--- a/Docs/Presentation/Helios_Artemis_Presentation_ABasic.pptx
+++ b/Docs/Presentation/Helios_Artemis_Presentation_ABasic.pptx
@@ -1715,6 +1715,10 @@
             <a:prstDash val="solid"/>
           </a:ln>
         </p:spPr>
+        <p:txBody>
+          <a:bodyPr/>
+          <a:p/>
+        </p:txBody>
       </p:sp>
       <p:sp>
         <p:nvSpPr>
@@ -1740,6 +1744,10 @@
             <a:prstDash val="solid"/>
           </a:ln>
         </p:spPr>
+        <p:txBody>
+          <a:bodyPr/>
+          <a:p/>
+        </p:txBody>
       </p:sp>
       <p:sp>
         <p:nvSpPr>
@@ -1884,6 +1892,10 @@
             <a:prstDash val="solid"/>
           </a:ln>
         </p:spPr>
+        <p:txBody>
+          <a:bodyPr/>
+          <a:p/>
+        </p:txBody>
       </p:sp>
       <p:sp>
         <p:nvSpPr>
@@ -1911,6 +1923,10 @@
             <a:prstDash val="solid"/>
           </a:ln>
         </p:spPr>
+        <p:txBody>
+          <a:bodyPr/>
+          <a:p/>
+        </p:txBody>
       </p:sp>
       <p:sp>
         <p:nvSpPr>
@@ -2008,6 +2024,10 @@
             <a:prstDash val="solid"/>
           </a:ln>
         </p:spPr>
+        <p:txBody>
+          <a:bodyPr/>
+          <a:p/>
+        </p:txBody>
       </p:sp>
       <p:sp>
         <p:nvSpPr>
@@ -2072,6 +2092,10 @@
             <a:prstDash val="solid"/>
           </a:ln>
         </p:spPr>
+        <p:txBody>
+          <a:bodyPr/>
+          <a:p/>
+        </p:txBody>
       </p:sp>
       <p:sp>
         <p:nvSpPr>
@@ -2101,6 +2125,10 @@
             <a:prstDash val="solid"/>
           </a:ln>
         </p:spPr>
+        <p:txBody>
+          <a:bodyPr/>
+          <a:p/>
+        </p:txBody>
       </p:sp>
       <p:sp>
         <p:nvSpPr>
@@ -2204,6 +2232,10 @@
             <a:prstDash val="solid"/>
           </a:ln>
         </p:spPr>
+        <p:txBody>
+          <a:bodyPr/>
+          <a:p/>
+        </p:txBody>
       </p:sp>
       <p:sp>
         <p:nvSpPr>
@@ -2233,6 +2265,10 @@
             <a:prstDash val="solid"/>
           </a:ln>
         </p:spPr>
+        <p:txBody>
+          <a:bodyPr/>
+          <a:p/>
+        </p:txBody>
       </p:sp>
       <p:sp>
         <p:nvSpPr>
@@ -2336,6 +2372,10 @@
             <a:prstDash val="solid"/>
           </a:ln>
         </p:spPr>
+        <p:txBody>
+          <a:bodyPr/>
+          <a:p/>
+        </p:txBody>
       </p:sp>
       <p:sp>
         <p:nvSpPr>
@@ -2365,6 +2405,10 @@
             <a:prstDash val="solid"/>
           </a:ln>
         </p:spPr>
+        <p:txBody>
+          <a:bodyPr/>
+          <a:p/>
+        </p:txBody>
       </p:sp>
       <p:sp>
         <p:nvSpPr>
@@ -2468,6 +2512,10 @@
             <a:prstDash val="solid"/>
           </a:ln>
         </p:spPr>
+        <p:txBody>
+          <a:bodyPr/>
+          <a:p/>
+        </p:txBody>
       </p:sp>
       <p:sp>
         <p:nvSpPr>
@@ -2497,6 +2545,10 @@
             <a:prstDash val="solid"/>
           </a:ln>
         </p:spPr>
+        <p:txBody>
+          <a:bodyPr/>
+          <a:p/>
+        </p:txBody>
       </p:sp>
       <p:sp>
         <p:nvSpPr>
@@ -2711,6 +2763,10 @@
             <a:prstDash val="solid"/>
           </a:ln>
         </p:spPr>
+        <p:txBody>
+          <a:bodyPr/>
+          <a:p/>
+        </p:txBody>
       </p:sp>
       <p:sp>
         <p:nvSpPr>
@@ -2821,6 +2877,10 @@
             </a:outerShdw>
           </a:effectLst>
         </p:spPr>
+        <p:txBody>
+          <a:bodyPr/>
+          <a:p/>
+        </p:txBody>
       </p:sp>
       <p:sp>
         <p:nvSpPr>
@@ -2948,6 +3008,10 @@
             </a:outerShdw>
           </a:effectLst>
         </p:spPr>
+        <p:txBody>
+          <a:bodyPr/>
+          <a:p/>
+        </p:txBody>
       </p:sp>
       <p:sp>
         <p:nvSpPr>
@@ -3075,6 +3139,10 @@
             </a:outerShdw>
           </a:effectLst>
         </p:spPr>
+        <p:txBody>
+          <a:bodyPr/>
+          <a:p/>
+        </p:txBody>
       </p:sp>
       <p:sp>
         <p:nvSpPr>
@@ -3202,6 +3270,10 @@
             </a:outerShdw>
           </a:effectLst>
         </p:spPr>
+        <p:txBody>
+          <a:bodyPr/>
+          <a:p/>
+        </p:txBody>
       </p:sp>
       <p:sp>
         <p:nvSpPr>
@@ -3227,6 +3299,10 @@
             <a:prstDash val="solid"/>
           </a:ln>
         </p:spPr>
+        <p:txBody>
+          <a:bodyPr/>
+          <a:p/>
+        </p:txBody>
       </p:sp>
       <p:sp>
         <p:nvSpPr>
@@ -3385,6 +3461,10 @@
             <a:prstDash val="solid"/>
           </a:ln>
         </p:spPr>
+        <p:txBody>
+          <a:bodyPr/>
+          <a:p/>
+        </p:txBody>
       </p:sp>
       <p:sp>
         <p:nvSpPr>
@@ -3488,6 +3568,10 @@
             <a:prstDash val="solid"/>
           </a:ln>
         </p:spPr>
+        <p:txBody>
+          <a:bodyPr/>
+          <a:p/>
+        </p:txBody>
       </p:sp>
       <p:sp>
         <p:nvSpPr>
@@ -3654,6 +3738,10 @@
             <a:prstDash val="solid"/>
           </a:ln>
         </p:spPr>
+        <p:txBody>
+          <a:bodyPr/>
+          <a:p/>
+        </p:txBody>
       </p:sp>
       <p:sp>
         <p:nvSpPr>
@@ -3718,6 +3806,10 @@
             <a:prstDash val="solid"/>
           </a:ln>
         </p:spPr>
+        <p:txBody>
+          <a:bodyPr/>
+          <a:p/>
+        </p:txBody>
       </p:sp>
       <p:sp>
         <p:nvSpPr>
@@ -3917,6 +4009,10 @@
             <a:prstDash val="solid"/>
           </a:ln>
         </p:spPr>
+        <p:txBody>
+          <a:bodyPr/>
+          <a:p/>
+        </p:txBody>
       </p:sp>
       <p:sp>
         <p:nvSpPr>
@@ -4020,6 +4116,10 @@
             <a:prstDash val="solid"/>
           </a:ln>
         </p:spPr>
+        <p:txBody>
+          <a:bodyPr/>
+          <a:p/>
+        </p:txBody>
       </p:sp>
       <p:sp>
         <p:nvSpPr>
@@ -4045,6 +4145,10 @@
             <a:prstDash val="solid"/>
           </a:ln>
         </p:spPr>
+        <p:txBody>
+          <a:bodyPr/>
+          <a:p/>
+        </p:txBody>
       </p:sp>
       <p:sp>
         <p:nvSpPr>
@@ -4359,6 +4463,10 @@
             <a:prstDash val="solid"/>
           </a:ln>
         </p:spPr>
+        <p:txBody>
+          <a:bodyPr/>
+          <a:p/>
+        </p:txBody>
       </p:sp>
       <p:sp>
         <p:nvSpPr>
@@ -4440,6 +4548,10 @@
             <a:prstDash val="solid"/>
           </a:ln>
         </p:spPr>
+        <p:txBody>
+          <a:bodyPr/>
+          <a:p/>
+        </p:txBody>
       </p:sp>
       <p:sp>
         <p:nvSpPr>
@@ -4465,6 +4577,10 @@
             <a:prstDash val="solid"/>
           </a:ln>
         </p:spPr>
+        <p:txBody>
+          <a:bodyPr/>
+          <a:p/>
+        </p:txBody>
       </p:sp>
       <p:sp>
         <p:nvSpPr>
@@ -4812,6 +4928,10 @@
             <a:prstDash val="solid"/>
           </a:ln>
         </p:spPr>
+        <p:txBody>
+          <a:bodyPr/>
+          <a:p/>
+        </p:txBody>
       </p:sp>
       <p:sp>
         <p:nvSpPr>
@@ -4922,6 +5042,10 @@
             </a:outerShdw>
           </a:effectLst>
         </p:spPr>
+        <p:txBody>
+          <a:bodyPr/>
+          <a:p/>
+        </p:txBody>
       </p:sp>
       <p:sp>
         <p:nvSpPr>
@@ -4947,6 +5071,10 @@
             <a:prstDash val="solid"/>
           </a:ln>
         </p:spPr>
+        <p:txBody>
+          <a:bodyPr/>
+          <a:p/>
+        </p:txBody>
       </p:sp>
       <p:sp>
         <p:nvSpPr>
@@ -5108,7 +5236,7 @@
                 <a:ea typeface="Calibri" pitchFamily="34" charset="-122"/>
                 <a:cs typeface="Calibri" pitchFamily="34" charset="-120"/>
               </a:rPr>
-              <a:t>  Only 7,430 parameters — tiny enough to run on a microchip in under 12 milliseconds</a:t>
+              <a:t>  Only 4,486 parameters — tiny enough to run on a microchip in under 12 milliseconds</a:t>
             </a:r>
             <a:endParaRPr lang="en-US" sz="1200" dirty="0"/>
           </a:p>
@@ -5159,6 +5287,10 @@
             <a:prstDash val="solid"/>
           </a:ln>
         </p:spPr>
+        <p:txBody>
+          <a:bodyPr/>
+          <a:p/>
+        </p:txBody>
       </p:sp>
       <p:sp>
         <p:nvSpPr>
@@ -5223,6 +5355,10 @@
             <a:prstDash val="solid"/>
           </a:ln>
         </p:spPr>
+        <p:txBody>
+          <a:bodyPr/>
+          <a:p/>
+        </p:txBody>
       </p:sp>
       <p:sp>
         <p:nvSpPr>
@@ -5326,6 +5462,10 @@
             <a:prstDash val="solid"/>
           </a:ln>
         </p:spPr>
+        <p:txBody>
+          <a:bodyPr/>
+          <a:p/>
+        </p:txBody>
       </p:sp>
       <p:sp>
         <p:nvSpPr>
@@ -5429,6 +5569,10 @@
             <a:prstDash val="solid"/>
           </a:ln>
         </p:spPr>
+        <p:txBody>
+          <a:bodyPr/>
+          <a:p/>
+        </p:txBody>
       </p:sp>
       <p:sp>
         <p:nvSpPr>
@@ -5532,6 +5676,10 @@
             <a:prstDash val="solid"/>
           </a:ln>
         </p:spPr>
+        <p:txBody>
+          <a:bodyPr/>
+          <a:p/>
+        </p:txBody>
       </p:sp>
       <p:sp>
         <p:nvSpPr>
@@ -5605,7 +5753,7 @@
                 <a:ea typeface="Calibri" pitchFamily="34" charset="-122"/>
                 <a:cs typeface="Calibri" pitchFamily="34" charset="-120"/>
               </a:rPr>
-              <a:t>7,430 total</a:t>
+              <a:t>4,486 total</a:t>
             </a:r>
             <a:endParaRPr lang="en-US" sz="1150" dirty="0"/>
           </a:p>
@@ -5635,6 +5783,10 @@
             <a:prstDash val="solid"/>
           </a:ln>
         </p:spPr>
+        <p:txBody>
+          <a:bodyPr/>
+          <a:p/>
+        </p:txBody>
       </p:sp>
       <p:sp>
         <p:nvSpPr>
@@ -5738,6 +5890,10 @@
             <a:prstDash val="solid"/>
           </a:ln>
         </p:spPr>
+        <p:txBody>
+          <a:bodyPr/>
+          <a:p/>
+        </p:txBody>
       </p:sp>
       <p:sp>
         <p:nvSpPr>
@@ -5841,6 +5997,10 @@
             <a:prstDash val="solid"/>
           </a:ln>
         </p:spPr>
+        <p:txBody>
+          <a:bodyPr/>
+          <a:p/>
+        </p:txBody>
       </p:sp>
       <p:sp>
         <p:nvSpPr>
@@ -5944,6 +6104,10 @@
             <a:prstDash val="solid"/>
           </a:ln>
         </p:spPr>
+        <p:txBody>
+          <a:bodyPr/>
+          <a:p/>
+        </p:txBody>
       </p:sp>
       <p:sp>
         <p:nvSpPr>
@@ -6080,6 +6244,10 @@
             <a:prstDash val="solid"/>
           </a:ln>
         </p:spPr>
+        <p:txBody>
+          <a:bodyPr/>
+          <a:p/>
+        </p:txBody>
       </p:sp>
       <p:sp>
         <p:nvSpPr>
@@ -6218,6 +6386,10 @@
             </a:outerShdw>
           </a:effectLst>
         </p:spPr>
+        <p:txBody>
+          <a:bodyPr/>
+          <a:p/>
+        </p:txBody>
       </p:sp>
       <p:sp>
         <p:nvSpPr>
@@ -6243,6 +6415,10 @@
             <a:prstDash val="solid"/>
           </a:ln>
         </p:spPr>
+        <p:txBody>
+          <a:bodyPr/>
+          <a:p/>
+        </p:txBody>
       </p:sp>
       <p:sp>
         <p:nvSpPr>
@@ -6399,6 +6575,10 @@
             </a:outerShdw>
           </a:effectLst>
         </p:spPr>
+        <p:txBody>
+          <a:bodyPr/>
+          <a:p/>
+        </p:txBody>
       </p:sp>
       <p:sp>
         <p:nvSpPr>
@@ -6424,6 +6604,10 @@
             <a:prstDash val="solid"/>
           </a:ln>
         </p:spPr>
+        <p:txBody>
+          <a:bodyPr/>
+          <a:p/>
+        </p:txBody>
       </p:sp>
       <p:sp>
         <p:nvSpPr>
@@ -6705,6 +6889,10 @@
             <a:prstDash val="solid"/>
           </a:ln>
         </p:spPr>
+        <p:txBody>
+          <a:bodyPr/>
+          <a:p/>
+        </p:txBody>
       </p:sp>
       <p:sp>
         <p:nvSpPr>
@@ -6810,6 +6998,10 @@
             <a:prstDash val="solid"/>
           </a:ln>
         </p:spPr>
+        <p:txBody>
+          <a:bodyPr/>
+          <a:p/>
+        </p:txBody>
       </p:sp>
       <p:sp>
         <p:nvSpPr>
@@ -6932,6 +7124,10 @@
             <a:prstDash val="solid"/>
           </a:ln>
         </p:spPr>
+        <p:txBody>
+          <a:bodyPr/>
+          <a:p/>
+        </p:txBody>
       </p:sp>
       <p:sp>
         <p:nvSpPr>
@@ -7054,6 +7250,10 @@
             <a:prstDash val="solid"/>
           </a:ln>
         </p:spPr>
+        <p:txBody>
+          <a:bodyPr/>
+          <a:p/>
+        </p:txBody>
       </p:sp>
       <p:sp>
         <p:nvSpPr>
@@ -7176,6 +7376,10 @@
             <a:prstDash val="solid"/>
           </a:ln>
         </p:spPr>
+        <p:txBody>
+          <a:bodyPr/>
+          <a:p/>
+        </p:txBody>
       </p:sp>
       <p:sp>
         <p:nvSpPr>
@@ -8780,6 +8984,10 @@
             <a:prstDash val="solid"/>
           </a:ln>
         </p:spPr>
+        <p:txBody>
+          <a:bodyPr/>
+          <a:p/>
+        </p:txBody>
       </p:sp>
       <p:sp>
         <p:nvSpPr>
@@ -8890,6 +9098,10 @@
             </a:outerShdw>
           </a:effectLst>
         </p:spPr>
+        <p:txBody>
+          <a:bodyPr/>
+          <a:p/>
+        </p:txBody>
       </p:sp>
       <p:sp>
         <p:nvSpPr>
@@ -8915,6 +9127,10 @@
             <a:prstDash val="solid"/>
           </a:ln>
         </p:spPr>
+        <p:txBody>
+          <a:bodyPr/>
+          <a:p/>
+        </p:txBody>
       </p:sp>
       <p:sp>
         <p:nvSpPr>
@@ -9034,6 +9250,10 @@
             <a:prstDash val="solid"/>
           </a:ln>
         </p:spPr>
+        <p:txBody>
+          <a:bodyPr/>
+          <a:p/>
+        </p:txBody>
       </p:sp>
       <p:sp>
         <p:nvSpPr>
@@ -9137,6 +9357,10 @@
             <a:prstDash val="solid"/>
           </a:ln>
         </p:spPr>
+        <p:txBody>
+          <a:bodyPr/>
+          <a:p/>
+        </p:txBody>
       </p:sp>
       <p:sp>
         <p:nvSpPr>
@@ -9240,6 +9464,10 @@
             <a:prstDash val="solid"/>
           </a:ln>
         </p:spPr>
+        <p:txBody>
+          <a:bodyPr/>
+          <a:p/>
+        </p:txBody>
       </p:sp>
       <p:sp>
         <p:nvSpPr>
@@ -9343,6 +9571,10 @@
             <a:prstDash val="solid"/>
           </a:ln>
         </p:spPr>
+        <p:txBody>
+          <a:bodyPr/>
+          <a:p/>
+        </p:txBody>
       </p:sp>
       <p:sp>
         <p:nvSpPr>
@@ -9479,6 +9711,10 @@
             <a:prstDash val="solid"/>
           </a:ln>
         </p:spPr>
+        <p:txBody>
+          <a:bodyPr/>
+          <a:p/>
+        </p:txBody>
       </p:sp>
       <p:sp>
         <p:nvSpPr>
@@ -9582,6 +9818,10 @@
             <a:prstDash val="solid"/>
           </a:ln>
         </p:spPr>
+        <p:txBody>
+          <a:bodyPr/>
+          <a:p/>
+        </p:txBody>
       </p:sp>
       <p:sp>
         <p:nvSpPr>
@@ -9752,6 +9992,10 @@
             <a:prstDash val="solid"/>
           </a:ln>
         </p:spPr>
+        <p:txBody>
+          <a:bodyPr/>
+          <a:p/>
+        </p:txBody>
       </p:sp>
       <p:sp>
         <p:nvSpPr>
@@ -9816,6 +10060,10 @@
             <a:prstDash val="solid"/>
           </a:ln>
         </p:spPr>
+        <p:txBody>
+          <a:bodyPr/>
+          <a:p/>
+        </p:txBody>
       </p:sp>
       <p:sp>
         <p:nvSpPr>
@@ -9919,6 +10167,10 @@
             <a:prstDash val="solid"/>
           </a:ln>
         </p:spPr>
+        <p:txBody>
+          <a:bodyPr/>
+          <a:p/>
+        </p:txBody>
       </p:sp>
       <p:sp>
         <p:nvSpPr>
@@ -10022,6 +10274,10 @@
             <a:prstDash val="solid"/>
           </a:ln>
         </p:spPr>
+        <p:txBody>
+          <a:bodyPr/>
+          <a:p/>
+        </p:txBody>
       </p:sp>
       <p:sp>
         <p:nvSpPr>
@@ -10095,7 +10351,7 @@
                 <a:ea typeface="Calibri" pitchFamily="34" charset="-122"/>
                 <a:cs typeface="Calibri" pitchFamily="34" charset="-120"/>
               </a:rPr>
-              <a:t>Replace IRFZ44N with IRFB4110 (86% less heat loss)</a:t>
+              <a:t>IRFB4110 MOSFET (86% less heat loss)</a:t>
             </a:r>
             <a:endParaRPr lang="en-US" sz="1250" dirty="0"/>
           </a:p>
@@ -10125,6 +10381,10 @@
             <a:prstDash val="solid"/>
           </a:ln>
         </p:spPr>
+        <p:txBody>
+          <a:bodyPr/>
+          <a:p/>
+        </p:txBody>
       </p:sp>
       <p:sp>
         <p:nvSpPr>
